--- a/SYS/ADHERENT_Design_Review.pptx
+++ b/SYS/ADHERENT_Design_Review.pptx
@@ -491,7 +491,7 @@
           <a:lstStyle xmlns:a="http://schemas.openxmlformats.org/drawingml/2006/main"/>
           <a:p xmlns:a="http://schemas.openxmlformats.org/drawingml/2006/main">
             <a:r>
-              <a:t>Project sources: SYS/ADHERENT_System_Wiring_Diagram.drawio; SYS/ADHERENT_Electrical_Tables.xlsx; brain.md. Current architecture: PSU1 24 V, SYSCTRL integrated 12 V SMPS and power connectors, CAN row control and RS485 IOCTRL. Unresolved interfaces retain TBC. </a:t>
+              <a:t>Project sources: SYS/ADHERENT_System_Wiring_Diagram.drawio; SYS/ADHERENT_Electrical_Tables.xlsx; brain.md. Current architecture: PSU1 24 V, SYSCTRL integrated 12 V SMPS and power connectors, CAN row control and RS485 to two IOCTRL modules. Unresolved interfaces retain TBC. </a:t>
             </a:r>
             <a:endParaRPr/>
           </a:p>
@@ -562,7 +562,7 @@
           <a:lstStyle xmlns:a="http://schemas.openxmlformats.org/drawingml/2006/main"/>
           <a:p xmlns:a="http://schemas.openxmlformats.org/drawingml/2006/main">
             <a:r>
-              <a:t>Project sources: SYS/ADHERENT_System_Wiring_Diagram.drawio; SYS/ADHERENT_Electrical_Tables.xlsx; brain.md. Current architecture: PSU1 24 V, SYSCTRL integrated 12 V SMPS and power connectors, CAN row control and RS485 IOCTRL. Unresolved interfaces retain TBC. </a:t>
+              <a:t>Project sources: SYS/ADHERENT_System_Wiring_Diagram.drawio; SYS/ADHERENT_Electrical_Tables.xlsx; brain.md. Current architecture: PSU1 24 V, SYSCTRL integrated 12 V SMPS and power connectors, CAN row control and RS485 to two IOCTRL modules. Unresolved interfaces retain TBC. </a:t>
             </a:r>
             <a:endParaRPr/>
           </a:p>
@@ -633,7 +633,7 @@
           <a:lstStyle xmlns:a="http://schemas.openxmlformats.org/drawingml/2006/main"/>
           <a:p xmlns:a="http://schemas.openxmlformats.org/drawingml/2006/main">
             <a:r>
-              <a:t>Project sources: SYS/ADHERENT_System_Wiring_Diagram.drawio; SYS/ADHERENT_Electrical_Tables.xlsx; brain.md. Current architecture: PSU1 24 V, SYSCTRL integrated 12 V SMPS and power connectors, CAN row control and RS485 IOCTRL. Unresolved interfaces retain TBC. </a:t>
+              <a:t>Project sources: SYS/ADHERENT_System_Wiring_Diagram.drawio; SYS/ADHERENT_Electrical_Tables.xlsx; brain.md. Current architecture: PSU1 24 V, SYSCTRL integrated 12 V SMPS and power connectors, CAN row control and RS485 to two IOCTRL modules. Unresolved interfaces retain TBC. </a:t>
             </a:r>
             <a:endParaRPr/>
           </a:p>
@@ -704,7 +704,7 @@
           <a:lstStyle xmlns:a="http://schemas.openxmlformats.org/drawingml/2006/main"/>
           <a:p xmlns:a="http://schemas.openxmlformats.org/drawingml/2006/main">
             <a:r>
-              <a:t>Project sources: SYS/ADHERENT_System_Wiring_Diagram.drawio; SYS/ADHERENT_Electrical_Tables.xlsx; brain.md. Current architecture: PSU1 24 V, SYSCTRL integrated 12 V SMPS and power connectors, CAN row control and RS485 IOCTRL. Unresolved interfaces retain TBC. </a:t>
+              <a:t>Project sources: SYS/ADHERENT_System_Wiring_Diagram.drawio; SYS/ADHERENT_Electrical_Tables.xlsx; brain.md. Current architecture: PSU1 24 V, SYSCTRL integrated 12 V SMPS and power connectors, CAN row control and RS485 to two IOCTRL modules. Unresolved interfaces retain TBC. </a:t>
             </a:r>
             <a:endParaRPr/>
           </a:p>
@@ -775,7 +775,7 @@
           <a:lstStyle xmlns:a="http://schemas.openxmlformats.org/drawingml/2006/main"/>
           <a:p xmlns:a="http://schemas.openxmlformats.org/drawingml/2006/main">
             <a:r>
-              <a:t>Project sources: SYS/ADHERENT_System_Wiring_Diagram.drawio; SYS/ADHERENT_Electrical_Tables.xlsx; brain.md. Current architecture: PSU1 24 V, SYSCTRL integrated 12 V SMPS and power connectors, CAN row control and RS485 IOCTRL. Unresolved interfaces retain TBC. </a:t>
+              <a:t>Project sources: SYS/ADHERENT_System_Wiring_Diagram.drawio; SYS/ADHERENT_Electrical_Tables.xlsx; brain.md. Current architecture: PSU1 24 V, SYSCTRL integrated 12 V SMPS and power connectors, CAN row control and RS485 to two IOCTRL modules. Unresolved interfaces retain TBC. </a:t>
             </a:r>
             <a:endParaRPr/>
           </a:p>
@@ -846,7 +846,7 @@
           <a:lstStyle xmlns:a="http://schemas.openxmlformats.org/drawingml/2006/main"/>
           <a:p xmlns:a="http://schemas.openxmlformats.org/drawingml/2006/main">
             <a:r>
-              <a:t>Project sources: SYS/ADHERENT_System_Wiring_Diagram.drawio; SYS/ADHERENT_Electrical_Tables.xlsx; brain.md. Current architecture: PSU1 24 V, SYSCTRL integrated 12 V SMPS and power connectors, CAN row control and RS485 IOCTRL. Unresolved interfaces retain TBC. Ethernet adapter: https://www.mcmaster.com/product/1422N13</a:t>
+              <a:t>Project sources: SYS/ADHERENT_System_Wiring_Diagram.drawio; SYS/ADHERENT_Electrical_Tables.xlsx; brain.md. Current architecture: PSU1 24 V, SYSCTRL integrated 12 V SMPS and power connectors, CAN row control and RS485 to two IOCTRL modules. Unresolved interfaces retain TBC. Ethernet adapter: https://www.mcmaster.com/product/1422N13</a:t>
             </a:r>
             <a:endParaRPr/>
           </a:p>
@@ -917,7 +917,7 @@
           <a:lstStyle xmlns:a="http://schemas.openxmlformats.org/drawingml/2006/main"/>
           <a:p xmlns:a="http://schemas.openxmlformats.org/drawingml/2006/main">
             <a:r>
-              <a:t>Project sources: SYS/ADHERENT_System_Wiring_Diagram.drawio; SYS/ADHERENT_Electrical_Tables.xlsx; brain.md. Current architecture: PSU1 24 V, SYSCTRL integrated 12 V SMPS and power connectors, CAN row control and RS485 IOCTRL. Unresolved interfaces retain TBC. </a:t>
+              <a:t>Project sources: SYS/ADHERENT_System_Wiring_Diagram.drawio; SYS/ADHERENT_Electrical_Tables.xlsx; brain.md. Current architecture: PSU1 24 V, SYSCTRL integrated 12 V SMPS and power connectors, CAN row control and RS485 to two IOCTRL modules. Unresolved interfaces retain TBC. </a:t>
             </a:r>
             <a:endParaRPr/>
           </a:p>
@@ -988,7 +988,7 @@
           <a:lstStyle xmlns:a="http://schemas.openxmlformats.org/drawingml/2006/main"/>
           <a:p xmlns:a="http://schemas.openxmlformats.org/drawingml/2006/main">
             <a:r>
-              <a:t>Project sources: SYS/ADHERENT_System_Wiring_Diagram.drawio; SYS/ADHERENT_Electrical_Tables.xlsx; brain.md. Current architecture: PSU1 24 V, SYSCTRL integrated 12 V SMPS and power connectors, CAN row control and RS485 IOCTRL. Unresolved interfaces retain TBC. </a:t>
+              <a:t>Project sources: SYS/ADHERENT_System_Wiring_Diagram.drawio; SYS/ADHERENT_Electrical_Tables.xlsx; brain.md. Current architecture: PSU1 24 V, SYSCTRL integrated 12 V SMPS and power connectors, CAN row control and RS485 to two IOCTRL modules. Unresolved interfaces retain TBC. </a:t>
             </a:r>
             <a:endParaRPr/>
           </a:p>
@@ -1059,7 +1059,7 @@
           <a:lstStyle xmlns:a="http://schemas.openxmlformats.org/drawingml/2006/main"/>
           <a:p xmlns:a="http://schemas.openxmlformats.org/drawingml/2006/main">
             <a:r>
-              <a:t>Project sources: SYS/ADHERENT_System_Wiring_Diagram.drawio; SYS/ADHERENT_Electrical_Tables.xlsx; brain.md. Current architecture: PSU1 24 V, SYSCTRL integrated 12 V SMPS and power connectors, CAN row control and RS485 IOCTRL. Unresolved interfaces retain TBC. NFC source: https://www.molex.com/en-us/products/part-detail/1462362151 and https://www.digikey.com/en/products/detail/molex/1462362151/15204370</a:t>
+              <a:t>Project sources: SYS/ADHERENT_System_Wiring_Diagram.drawio; SYS/ADHERENT_Electrical_Tables.xlsx; brain.md. Current architecture: PSU1 24 V, SYSCTRL integrated 12 V SMPS and power connectors, CAN row control and RS485 to two IOCTRL modules. Unresolved interfaces retain TBC. NFC source: https://www.molex.com/en-us/products/part-detail/1462362151 and https://www.digikey.com/en/products/detail/molex/1462362151/15204370</a:t>
             </a:r>
             <a:endParaRPr/>
           </a:p>
@@ -1130,7 +1130,7 @@
           <a:lstStyle xmlns:a="http://schemas.openxmlformats.org/drawingml/2006/main"/>
           <a:p xmlns:a="http://schemas.openxmlformats.org/drawingml/2006/main">
             <a:r>
-              <a:t>Project sources: SYS/ADHERENT_System_Wiring_Diagram.drawio; SYS/ADHERENT_Electrical_Tables.xlsx; brain.md. Current architecture: PSU1 24 V, SYSCTRL integrated 12 V SMPS and power connectors, CAN row control and RS485 IOCTRL. Unresolved interfaces retain TBC. </a:t>
+              <a:t>Project sources: SYS/ADHERENT_System_Wiring_Diagram.drawio; SYS/ADHERENT_Electrical_Tables.xlsx; brain.md. Current architecture: PSU1 24 V, SYSCTRL integrated 12 V SMPS and power connectors, CAN row control and RS485 to two IOCTRL modules. Unresolved interfaces retain TBC. </a:t>
             </a:r>
             <a:endParaRPr/>
           </a:p>
@@ -2645,7 +2645,7 @@
                 <a:ea typeface="Calibri"/>
                 <a:cs typeface="Calibri"/>
               </a:rPr>
-              <a:t>IOCTRL protocol and native pinouts</a:t>
+              <a:t>IOCTRL ×2: addressing, I/O split, pinouts</a:t>
             </a:r>
             <a:endParaRPr sz="1150"/>
           </a:p>
@@ -5755,7 +5755,7 @@
                 <a:ea typeface="Cambria"/>
                 <a:cs typeface="Cambria"/>
               </a:rPr>
-              <a:t>2</a:t>
+              <a:t>3</a:t>
             </a:r>
             <a:endParaRPr sz="4000"/>
           </a:p>
@@ -5829,7 +5829,7 @@
                 <a:ea typeface="Calibri"/>
                 <a:cs typeface="Calibri"/>
               </a:rPr>
-              <a:t>IOCTRL</a:t>
+              <a:t>IOCTRL ×2</a:t>
             </a:r>
             <a:endParaRPr sz="1100"/>
           </a:p>
@@ -6123,7 +6123,7 @@
                 <a:ea typeface="Calibri"/>
                 <a:cs typeface="Calibri"/>
               </a:rPr>
-              <a:t>MAINCTRL ×1 and IOCTRL ×1 are COTS. SYSCTRL ×1 and LANECTRL ×10 are custom assemblies. Each lane row has seven motors, buttons and LEDs.</a:t>
+              <a:t>MAINCTRL ×1 and IOCTRL ×2 are COTS. SYSCTRL ×1 and LANECTRL ×10 are custom assemblies. Each lane row has seven motors, buttons and LEDs.</a:t>
             </a:r>
             <a:endParaRPr sz="1100"/>
           </a:p>
@@ -6423,7 +6423,7 @@
                 <a:ea typeface="Calibri"/>
                 <a:cs typeface="Calibri"/>
               </a:rPr>
-              <a:t>CAN links MAINCTRL, SYSCTRL and the ten LANECTRL boards. RS485 links MAINCTRL and IOCTRL. Ethernet connects the site network.</a:t>
+              <a:t>CAN links MAINCTRL, SYSCTRL and the ten LANECTRL boards. RS485 links MAINCTRL and both IOCTRL modules. Ethernet connects the site network.</a:t>
             </a:r>
             <a:endParaRPr sz="1100"/>
           </a:p>
@@ -10291,7 +10291,7 @@
                 <a:ea typeface="Calibri"/>
                 <a:cs typeface="Calibri"/>
               </a:rPr>
-              <a:t>W15 carries six direct gantry sensor runs to SYSCTRL. W23 carries five direct door sensor runs to IOCTRL.</a:t>
+              <a:t>W15 carries six direct gantry sensor runs to SYSCTRL. W23 carries five direct door sensor runs to IOCTRL; split across the two modules TBC.</a:t>
             </a:r>
             <a:endParaRPr sz="1300"/>
           </a:p>
@@ -10961,7 +10961,7 @@
                 <a:ea typeface="Arial"/>
                 <a:cs typeface="Arial"/>
               </a:rPr>
-              <a:t>IOCTRL</a:t>
+              <a:t>IOCTRL ×2</a:t>
             </a:r>
           </a:p>
           <a:p xmlns:a="http://schemas.openxmlformats.org/drawingml/2006/main">

--- a/SYS/ADHERENT_Design_Review.pptx
+++ b/SYS/ADHERENT_Design_Review.pptx
@@ -11213,7 +11213,7 @@
                 <a:ea typeface="Arial"/>
                 <a:cs typeface="Arial"/>
               </a:rPr>
-              <a:t>Bracket / feedback interface TBC</a:t>
+              <a:t>Bracket fit / signal pin check TBC</a:t>
             </a:r>
           </a:p>
         </p:txBody>
@@ -12921,7 +12921,7 @@
                 <a:ea typeface="Calibri"/>
                 <a:cs typeface="Calibri"/>
               </a:rPr>
-              <a:t>HOLD O03/O05/O06: conveyor feedback, H-bridge/TVS coordination and protection.</a:t>
+              <a:t>HOLD O03/O05/O06: conveyor feedback, high-side switch/TVS coordination and protection.</a:t>
             </a:r>
             <a:endParaRPr sz="1000"/>
           </a:p>
